--- a/ゲーム科1年/00_前期/プログラミングⅠ/03_ひな形(最小限のプログラム).pptx
+++ b/ゲーム科1年/00_前期/プログラミングⅠ/03_ひな形(最小限のプログラム).pptx
@@ -264,7 +264,7 @@
           <a:p>
             <a:fld id="{E9CC885B-4903-4D54-9A93-00025F12DED9}" type="datetimeFigureOut">
               <a:rPr kumimoji="1" lang="ja-JP" altLang="en-US" smtClean="0"/>
-              <a:t>2024/11/14</a:t>
+              <a:t>2025/2/28</a:t>
             </a:fld>
             <a:endParaRPr kumimoji="1" lang="ja-JP" altLang="en-US"/>
           </a:p>
@@ -494,7 +494,7 @@
           <a:p>
             <a:fld id="{E9CC885B-4903-4D54-9A93-00025F12DED9}" type="datetimeFigureOut">
               <a:rPr kumimoji="1" lang="ja-JP" altLang="en-US" smtClean="0"/>
-              <a:t>2024/11/14</a:t>
+              <a:t>2025/2/28</a:t>
             </a:fld>
             <a:endParaRPr kumimoji="1" lang="ja-JP" altLang="en-US"/>
           </a:p>
@@ -734,7 +734,7 @@
           <a:p>
             <a:fld id="{E9CC885B-4903-4D54-9A93-00025F12DED9}" type="datetimeFigureOut">
               <a:rPr kumimoji="1" lang="ja-JP" altLang="en-US" smtClean="0"/>
-              <a:t>2024/11/14</a:t>
+              <a:t>2025/2/28</a:t>
             </a:fld>
             <a:endParaRPr kumimoji="1" lang="ja-JP" altLang="en-US"/>
           </a:p>
@@ -964,7 +964,7 @@
           <a:p>
             <a:fld id="{E9CC885B-4903-4D54-9A93-00025F12DED9}" type="datetimeFigureOut">
               <a:rPr kumimoji="1" lang="ja-JP" altLang="en-US" smtClean="0"/>
-              <a:t>2024/11/14</a:t>
+              <a:t>2025/2/28</a:t>
             </a:fld>
             <a:endParaRPr kumimoji="1" lang="ja-JP" altLang="en-US"/>
           </a:p>
@@ -1239,7 +1239,7 @@
           <a:p>
             <a:fld id="{E9CC885B-4903-4D54-9A93-00025F12DED9}" type="datetimeFigureOut">
               <a:rPr kumimoji="1" lang="ja-JP" altLang="en-US" smtClean="0"/>
-              <a:t>2024/11/14</a:t>
+              <a:t>2025/2/28</a:t>
             </a:fld>
             <a:endParaRPr kumimoji="1" lang="ja-JP" altLang="en-US"/>
           </a:p>
@@ -1568,7 +1568,7 @@
           <a:p>
             <a:fld id="{E9CC885B-4903-4D54-9A93-00025F12DED9}" type="datetimeFigureOut">
               <a:rPr kumimoji="1" lang="ja-JP" altLang="en-US" smtClean="0"/>
-              <a:t>2024/11/14</a:t>
+              <a:t>2025/2/28</a:t>
             </a:fld>
             <a:endParaRPr kumimoji="1" lang="ja-JP" altLang="en-US"/>
           </a:p>
@@ -2044,7 +2044,7 @@
           <a:p>
             <a:fld id="{E9CC885B-4903-4D54-9A93-00025F12DED9}" type="datetimeFigureOut">
               <a:rPr kumimoji="1" lang="ja-JP" altLang="en-US" smtClean="0"/>
-              <a:t>2024/11/14</a:t>
+              <a:t>2025/2/28</a:t>
             </a:fld>
             <a:endParaRPr kumimoji="1" lang="ja-JP" altLang="en-US"/>
           </a:p>
@@ -2185,7 +2185,7 @@
           <a:p>
             <a:fld id="{E9CC885B-4903-4D54-9A93-00025F12DED9}" type="datetimeFigureOut">
               <a:rPr kumimoji="1" lang="ja-JP" altLang="en-US" smtClean="0"/>
-              <a:t>2024/11/14</a:t>
+              <a:t>2025/2/28</a:t>
             </a:fld>
             <a:endParaRPr kumimoji="1" lang="ja-JP" altLang="en-US"/>
           </a:p>
@@ -2298,7 +2298,7 @@
           <a:p>
             <a:fld id="{E9CC885B-4903-4D54-9A93-00025F12DED9}" type="datetimeFigureOut">
               <a:rPr kumimoji="1" lang="ja-JP" altLang="en-US" smtClean="0"/>
-              <a:t>2024/11/14</a:t>
+              <a:t>2025/2/28</a:t>
             </a:fld>
             <a:endParaRPr kumimoji="1" lang="ja-JP" altLang="en-US"/>
           </a:p>
@@ -2641,7 +2641,7 @@
           <a:p>
             <a:fld id="{E9CC885B-4903-4D54-9A93-00025F12DED9}" type="datetimeFigureOut">
               <a:rPr kumimoji="1" lang="ja-JP" altLang="en-US" smtClean="0"/>
-              <a:t>2024/11/14</a:t>
+              <a:t>2025/2/28</a:t>
             </a:fld>
             <a:endParaRPr kumimoji="1" lang="ja-JP" altLang="en-US"/>
           </a:p>
@@ -2929,7 +2929,7 @@
           <a:p>
             <a:fld id="{E9CC885B-4903-4D54-9A93-00025F12DED9}" type="datetimeFigureOut">
               <a:rPr kumimoji="1" lang="ja-JP" altLang="en-US" smtClean="0"/>
-              <a:t>2024/11/14</a:t>
+              <a:t>2025/2/28</a:t>
             </a:fld>
             <a:endParaRPr kumimoji="1" lang="ja-JP" altLang="en-US"/>
           </a:p>
@@ -3202,7 +3202,7 @@
           <a:p>
             <a:fld id="{E9CC885B-4903-4D54-9A93-00025F12DED9}" type="datetimeFigureOut">
               <a:rPr kumimoji="1" lang="ja-JP" altLang="en-US" smtClean="0"/>
-              <a:t>2024/11/14</a:t>
+              <a:t>2025/2/28</a:t>
             </a:fld>
             <a:endParaRPr kumimoji="1" lang="ja-JP" altLang="en-US"/>
           </a:p>
@@ -3705,7 +3705,7 @@
         <p:spPr>
           <a:xfrm>
             <a:off x="567542" y="1189161"/>
-            <a:ext cx="7031092" cy="461665"/>
+            <a:ext cx="7111242" cy="461665"/>
           </a:xfrm>
           <a:prstGeom prst="rect">
             <a:avLst/>
@@ -3723,7 +3723,11 @@
               <a:t>初めに、</a:t>
             </a:r>
             <a:r>
-              <a:rPr kumimoji="1" lang="en-US" altLang="ja-JP" sz="2400" dirty="0"/>
+              <a:rPr kumimoji="1" lang="en-US" altLang="ja-JP" sz="2400" b="1" dirty="0">
+                <a:solidFill>
+                  <a:srgbClr val="FF0000"/>
+                </a:solidFill>
+              </a:rPr>
               <a:t>Main.cpp</a:t>
             </a:r>
             <a:r>
@@ -3749,7 +3753,7 @@
         <p:spPr>
           <a:xfrm>
             <a:off x="567542" y="5687732"/>
-            <a:ext cx="5109091" cy="461665"/>
+            <a:ext cx="4185761" cy="461665"/>
           </a:xfrm>
           <a:prstGeom prst="rect">
             <a:avLst/>
@@ -3764,7 +3768,7 @@
           <a:p>
             <a:r>
               <a:rPr lang="ja-JP" altLang="en-US" sz="2400" dirty="0"/>
-              <a:t>続いて何を書いたかを解説します。</a:t>
+              <a:t>何を書いたかを解説します。</a:t>
             </a:r>
             <a:endParaRPr kumimoji="1" lang="en-US" altLang="ja-JP" sz="2400" dirty="0"/>
           </a:p>
